--- a/dist/초2/체육·보건·안전/경계와안전/초2_체육·보건·안전_경계와안전_01_싫어요말하기와안전_학생용.pptx
+++ b/dist/초2/체육·보건·안전/경계와안전/초2_체육·보건·안전_경계와안전_01_싫어요말하기와안전_학생용.pptx
@@ -119,13 +119,13 @@
   <p:extLst>
     <p:ext uri="{521415D9-36F7-43E2-AB2F-B90AF26B5E84}">
       <p14:sectionLst xmlns:p14="http://schemas.microsoft.com/office/powerpoint/2010/main">
-        <p14:section name="도입" id="{8f4d562d-d6bb-e46f-7265-7c4cbd600ac2}">
+        <p14:section name="도입" id="{fc15ef77-04a8-e5bf-3039-26fc2b006d39}">
           <p14:sldIdLst>
             <p14:sldId id="256"/>
             <p14:sldId id="257"/>
           </p14:sldIdLst>
         </p14:section>
-        <p14:section name="개념" id="{385ee33e-f27b-b107-28b7-a6e9a77569f3}">
+        <p14:section name="개념" id="{a3e83230-be29-657d-d6c0-65457d9712d1}">
           <p14:sldIdLst>
             <p14:sldId id="258"/>
             <p14:sldId id="259"/>
@@ -134,36 +134,36 @@
             <p14:sldId id="264"/>
           </p14:sldIdLst>
         </p14:section>
-        <p14:section name="연습" id="{1e86b7be-f6bb-66fd-0817-ef95c82a66d9}">
+        <p14:section name="연습" id="{0eed43ff-8066-1392-afed-7405f0a46457}">
           <p14:sldIdLst>
             <p14:sldId id="260"/>
             <p14:sldId id="262"/>
             <p14:sldId id="265"/>
           </p14:sldIdLst>
         </p14:section>
-        <p14:section name="개념" id="{cd4677a4-0e6c-d99c-dbf7-5c78d42e7152}">
+        <p14:section name="개념" id="{ecb6c2d2-9e50-e703-1986-2533c3ded7d9}">
           <p14:sldIdLst/>
         </p14:section>
-        <p14:section name="연습" id="{64f5b196-d215-3066-385a-7d7b6d588659}">
+        <p14:section name="연습" id="{6b7a4dd7-7e1e-098c-2afd-bea1a43e3508}">
           <p14:sldIdLst/>
         </p14:section>
-        <p14:section name="개념" id="{ab85c2a4-a0e1-fa2e-ef59-f1a509fcf34e}">
+        <p14:section name="개념" id="{c101efab-4151-cef0-c97c-407599a2c3d0}">
           <p14:sldIdLst/>
         </p14:section>
-        <p14:section name="연습" id="{db0ea4b7-38d3-ea8a-1f38-07047b1324bf}">
+        <p14:section name="연습" id="{a10a71eb-5f28-2ec4-a171-2ad530cfd4c0}">
           <p14:sldIdLst/>
         </p14:section>
-        <p14:section name="확인" id="{a5a7aa96-75b3-1684-8d5b-bf93a8936509}">
+        <p14:section name="확인" id="{f64ffb6c-3e8f-03f7-5b62-0bd2dd5f97e8}">
           <p14:sldIdLst>
             <p14:sldId id="266"/>
           </p14:sldIdLst>
         </p14:section>
-        <p14:section name="정리" id="{92f8a400-2c58-086a-d94f-2370be902157}">
+        <p14:section name="정리" id="{f32e7994-5a10-3cd3-560c-64fb121888d1}">
           <p14:sldIdLst>
             <p14:sldId id="267"/>
           </p14:sldIdLst>
         </p14:section>
-        <p14:section name="보충" id="{75e57654-c7f0-c229-6586-e10a2905ca41}">
+        <p14:section name="보충" id="{f749daae-f972-48ff-e6ef-e7ef3720263a}">
           <p14:sldIdLst>
             <p14:sldId id="268"/>
           </p14:sldIdLst>
